--- a/документы/Мессенджер Naki.pptx
+++ b/документы/Мессенджер Naki.pptx
@@ -10,18 +10,19 @@
     <p:sldId id="274" r:id="rId4"/>
     <p:sldId id="273" r:id="rId5"/>
     <p:sldId id="258" r:id="rId6"/>
-    <p:sldId id="275" r:id="rId7"/>
+    <p:sldId id="276" r:id="rId7"/>
     <p:sldId id="267" r:id="rId8"/>
-    <p:sldId id="276" r:id="rId9"/>
-    <p:sldId id="268" r:id="rId10"/>
-    <p:sldId id="265" r:id="rId11"/>
-    <p:sldId id="266" r:id="rId12"/>
-    <p:sldId id="269" r:id="rId13"/>
-    <p:sldId id="259" r:id="rId14"/>
-    <p:sldId id="262" r:id="rId15"/>
-    <p:sldId id="270" r:id="rId16"/>
-    <p:sldId id="263" r:id="rId17"/>
-    <p:sldId id="264" r:id="rId18"/>
+    <p:sldId id="275" r:id="rId9"/>
+    <p:sldId id="277" r:id="rId10"/>
+    <p:sldId id="268" r:id="rId11"/>
+    <p:sldId id="265" r:id="rId12"/>
+    <p:sldId id="266" r:id="rId13"/>
+    <p:sldId id="269" r:id="rId14"/>
+    <p:sldId id="259" r:id="rId15"/>
+    <p:sldId id="262" r:id="rId16"/>
+    <p:sldId id="270" r:id="rId17"/>
+    <p:sldId id="263" r:id="rId18"/>
+    <p:sldId id="264" r:id="rId19"/>
   </p:sldIdLst>
   <p:sldSz cx="12192000" cy="6858000"/>
   <p:notesSz cx="6858000" cy="9144000"/>
@@ -275,7 +276,7 @@
           <a:p>
             <a:fld id="{8A1AF4FE-3ABE-4D79-BD55-1C23135AD9DB}" type="datetimeFigureOut">
               <a:rPr lang="ru-RU" smtClean="0"/>
-              <a:t>18.02.2026</a:t>
+              <a:t>18.03.2026</a:t>
             </a:fld>
             <a:endParaRPr lang="ru-RU"/>
           </a:p>
@@ -473,7 +474,7 @@
           <a:p>
             <a:fld id="{8A1AF4FE-3ABE-4D79-BD55-1C23135AD9DB}" type="datetimeFigureOut">
               <a:rPr lang="ru-RU" smtClean="0"/>
-              <a:t>18.02.2026</a:t>
+              <a:t>18.03.2026</a:t>
             </a:fld>
             <a:endParaRPr lang="ru-RU"/>
           </a:p>
@@ -681,7 +682,7 @@
           <a:p>
             <a:fld id="{8A1AF4FE-3ABE-4D79-BD55-1C23135AD9DB}" type="datetimeFigureOut">
               <a:rPr lang="ru-RU" smtClean="0"/>
-              <a:t>18.02.2026</a:t>
+              <a:t>18.03.2026</a:t>
             </a:fld>
             <a:endParaRPr lang="ru-RU"/>
           </a:p>
@@ -879,7 +880,7 @@
           <a:p>
             <a:fld id="{8A1AF4FE-3ABE-4D79-BD55-1C23135AD9DB}" type="datetimeFigureOut">
               <a:rPr lang="ru-RU" smtClean="0"/>
-              <a:t>18.02.2026</a:t>
+              <a:t>18.03.2026</a:t>
             </a:fld>
             <a:endParaRPr lang="ru-RU"/>
           </a:p>
@@ -1154,7 +1155,7 @@
           <a:p>
             <a:fld id="{8A1AF4FE-3ABE-4D79-BD55-1C23135AD9DB}" type="datetimeFigureOut">
               <a:rPr lang="ru-RU" smtClean="0"/>
-              <a:t>18.02.2026</a:t>
+              <a:t>18.03.2026</a:t>
             </a:fld>
             <a:endParaRPr lang="ru-RU"/>
           </a:p>
@@ -1419,7 +1420,7 @@
           <a:p>
             <a:fld id="{8A1AF4FE-3ABE-4D79-BD55-1C23135AD9DB}" type="datetimeFigureOut">
               <a:rPr lang="ru-RU" smtClean="0"/>
-              <a:t>18.02.2026</a:t>
+              <a:t>18.03.2026</a:t>
             </a:fld>
             <a:endParaRPr lang="ru-RU"/>
           </a:p>
@@ -1831,7 +1832,7 @@
           <a:p>
             <a:fld id="{8A1AF4FE-3ABE-4D79-BD55-1C23135AD9DB}" type="datetimeFigureOut">
               <a:rPr lang="ru-RU" smtClean="0"/>
-              <a:t>18.02.2026</a:t>
+              <a:t>18.03.2026</a:t>
             </a:fld>
             <a:endParaRPr lang="ru-RU"/>
           </a:p>
@@ -1972,7 +1973,7 @@
           <a:p>
             <a:fld id="{8A1AF4FE-3ABE-4D79-BD55-1C23135AD9DB}" type="datetimeFigureOut">
               <a:rPr lang="ru-RU" smtClean="0"/>
-              <a:t>18.02.2026</a:t>
+              <a:t>18.03.2026</a:t>
             </a:fld>
             <a:endParaRPr lang="ru-RU"/>
           </a:p>
@@ -2085,7 +2086,7 @@
           <a:p>
             <a:fld id="{8A1AF4FE-3ABE-4D79-BD55-1C23135AD9DB}" type="datetimeFigureOut">
               <a:rPr lang="ru-RU" smtClean="0"/>
-              <a:t>18.02.2026</a:t>
+              <a:t>18.03.2026</a:t>
             </a:fld>
             <a:endParaRPr lang="ru-RU"/>
           </a:p>
@@ -2396,7 +2397,7 @@
           <a:p>
             <a:fld id="{8A1AF4FE-3ABE-4D79-BD55-1C23135AD9DB}" type="datetimeFigureOut">
               <a:rPr lang="ru-RU" smtClean="0"/>
-              <a:t>18.02.2026</a:t>
+              <a:t>18.03.2026</a:t>
             </a:fld>
             <a:endParaRPr lang="ru-RU"/>
           </a:p>
@@ -2684,7 +2685,7 @@
           <a:p>
             <a:fld id="{8A1AF4FE-3ABE-4D79-BD55-1C23135AD9DB}" type="datetimeFigureOut">
               <a:rPr lang="ru-RU" smtClean="0"/>
-              <a:t>18.02.2026</a:t>
+              <a:t>18.03.2026</a:t>
             </a:fld>
             <a:endParaRPr lang="ru-RU"/>
           </a:p>
@@ -2925,7 +2926,7 @@
           <a:p>
             <a:fld id="{8A1AF4FE-3ABE-4D79-BD55-1C23135AD9DB}" type="datetimeFigureOut">
               <a:rPr lang="ru-RU" smtClean="0"/>
-              <a:t>18.02.2026</a:t>
+              <a:t>18.03.2026</a:t>
             </a:fld>
             <a:endParaRPr lang="ru-RU"/>
           </a:p>
@@ -3932,36 +3933,99 @@
       </p:grpSpPr>
       <p:pic>
         <p:nvPicPr>
-          <p:cNvPr id="5" name="Объект 4">
-            <a:extLst>
-              <a:ext uri="{FF2B5EF4-FFF2-40B4-BE49-F238E27FC236}">
-                <a16:creationId xmlns:a16="http://schemas.microsoft.com/office/drawing/2014/main" id="{86AD16D7-D6BF-4072-9086-C9279E7789ED}"/>
+          <p:cNvPr id="5" name="Рисунок 4">
+            <a:extLst>
+              <a:ext uri="{FF2B5EF4-FFF2-40B4-BE49-F238E27FC236}">
+                <a16:creationId xmlns:a16="http://schemas.microsoft.com/office/drawing/2014/main" id="{44F882AB-839B-4304-8441-5D9013D18DFA}"/>
               </a:ext>
             </a:extLst>
           </p:cNvPr>
           <p:cNvPicPr>
-            <a:picLocks noGrp="1" noChangeAspect="1"/>
+            <a:picLocks noChangeAspect="1"/>
           </p:cNvPicPr>
-          <p:nvPr>
-            <p:ph idx="1"/>
-          </p:nvPr>
+          <p:nvPr/>
         </p:nvPicPr>
-        <p:blipFill rotWithShape="1">
+        <p:blipFill>
           <a:blip r:embed="rId2"/>
-          <a:srcRect t="1123"/>
-          <a:stretch/>
+          <a:stretch>
+            <a:fillRect/>
+          </a:stretch>
         </p:blipFill>
         <p:spPr>
           <a:xfrm>
-            <a:off x="250053" y="386600"/>
-            <a:ext cx="11691894" cy="6084799"/>
+            <a:off x="0" y="496522"/>
+            <a:ext cx="12192000" cy="5864956"/>
           </a:xfrm>
+          <a:prstGeom prst="rect">
+            <a:avLst/>
+          </a:prstGeom>
         </p:spPr>
       </p:pic>
+      <p:sp>
+        <p:nvSpPr>
+          <p:cNvPr id="2" name="Заголовок 1">
+            <a:extLst>
+              <a:ext uri="{FF2B5EF4-FFF2-40B4-BE49-F238E27FC236}">
+                <a16:creationId xmlns:a16="http://schemas.microsoft.com/office/drawing/2014/main" id="{23826193-A27C-4EA5-9FA5-12CBCC55A661}"/>
+              </a:ext>
+            </a:extLst>
+          </p:cNvPr>
+          <p:cNvSpPr>
+            <a:spLocks noGrp="1"/>
+          </p:cNvSpPr>
+          <p:nvPr>
+            <p:ph type="title"/>
+          </p:nvPr>
+        </p:nvSpPr>
+        <p:spPr/>
+        <p:txBody>
+          <a:bodyPr/>
+          <a:lstStyle/>
+          <a:p>
+            <a:r>
+              <a:rPr lang="ru-RU" b="1" dirty="0">
+                <a:solidFill>
+                  <a:srgbClr val="0F8B8D"/>
+                </a:solidFill>
+                <a:latin typeface="Nitro"/>
+              </a:rPr>
+              <a:t>Вид пользовательского интерфейса</a:t>
+            </a:r>
+          </a:p>
+        </p:txBody>
+      </p:sp>
+      <p:sp>
+        <p:nvSpPr>
+          <p:cNvPr id="3" name="Объект 2">
+            <a:extLst>
+              <a:ext uri="{FF2B5EF4-FFF2-40B4-BE49-F238E27FC236}">
+                <a16:creationId xmlns:a16="http://schemas.microsoft.com/office/drawing/2014/main" id="{A132BF6F-16A8-49B4-973F-79636197B093}"/>
+              </a:ext>
+            </a:extLst>
+          </p:cNvPr>
+          <p:cNvSpPr>
+            <a:spLocks noGrp="1"/>
+          </p:cNvSpPr>
+          <p:nvPr>
+            <p:ph idx="1"/>
+          </p:nvPr>
+        </p:nvSpPr>
+        <p:spPr/>
+        <p:txBody>
+          <a:bodyPr/>
+          <a:lstStyle/>
+          <a:p>
+            <a:pPr marL="0" indent="0">
+              <a:buNone/>
+            </a:pPr>
+            <a:endParaRPr lang="ru-RU" dirty="0"/>
+          </a:p>
+        </p:txBody>
+      </p:sp>
     </p:spTree>
     <p:extLst>
       <p:ext uri="{BB962C8B-B14F-4D97-AF65-F5344CB8AC3E}">
-        <p14:creationId xmlns:p14="http://schemas.microsoft.com/office/powerpoint/2010/main" val="2924927354"/>
+        <p14:creationId xmlns:p14="http://schemas.microsoft.com/office/powerpoint/2010/main" val="3325232728"/>
       </p:ext>
     </p:extLst>
   </p:cSld>
@@ -3993,7 +4057,7 @@
           <p:cNvPr id="5" name="Объект 4">
             <a:extLst>
               <a:ext uri="{FF2B5EF4-FFF2-40B4-BE49-F238E27FC236}">
-                <a16:creationId xmlns:a16="http://schemas.microsoft.com/office/drawing/2014/main" id="{5D8B4F46-79B9-470D-9C1A-D0DE89D529EB}"/>
+                <a16:creationId xmlns:a16="http://schemas.microsoft.com/office/drawing/2014/main" id="{86AD16D7-D6BF-4072-9086-C9279E7789ED}"/>
               </a:ext>
             </a:extLst>
           </p:cNvPr>
@@ -4004,72 +4068,22 @@
             <p:ph idx="1"/>
           </p:nvPr>
         </p:nvPicPr>
-        <p:blipFill>
-          <a:blip r:embed="rId2">
-            <a:extLst>
-              <a:ext uri="{28A0092B-C50C-407E-A947-70E740481C1C}">
-                <a14:useLocalDpi xmlns:a14="http://schemas.microsoft.com/office/drawing/2010/main" val="0"/>
-              </a:ext>
-            </a:extLst>
-          </a:blip>
-          <a:stretch>
-            <a:fillRect/>
-          </a:stretch>
+        <p:blipFill rotWithShape="1">
+          <a:blip r:embed="rId2"/>
+          <a:srcRect t="1123"/>
+          <a:stretch/>
         </p:blipFill>
         <p:spPr>
           <a:xfrm>
-            <a:off x="1651201" y="1706560"/>
-            <a:ext cx="8889597" cy="3444880"/>
+            <a:off x="250053" y="386600"/>
+            <a:ext cx="11691894" cy="6084799"/>
           </a:xfrm>
         </p:spPr>
       </p:pic>
-      <p:sp>
-        <p:nvSpPr>
-          <p:cNvPr id="4" name="Заголовок 3">
-            <a:extLst>
-              <a:ext uri="{FF2B5EF4-FFF2-40B4-BE49-F238E27FC236}">
-                <a16:creationId xmlns:a16="http://schemas.microsoft.com/office/drawing/2014/main" id="{56239CED-F83E-4522-A408-B541449884DD}"/>
-              </a:ext>
-            </a:extLst>
-          </p:cNvPr>
-          <p:cNvSpPr>
-            <a:spLocks noGrp="1"/>
-          </p:cNvSpPr>
-          <p:nvPr>
-            <p:ph type="title"/>
-          </p:nvPr>
-        </p:nvSpPr>
-        <p:spPr/>
-        <p:txBody>
-          <a:bodyPr>
-            <a:normAutofit/>
-          </a:bodyPr>
-          <a:lstStyle/>
-          <a:p>
-            <a:r>
-              <a:rPr lang="ru-RU" b="1" dirty="0">
-                <a:solidFill>
-                  <a:srgbClr val="0F8B8D"/>
-                </a:solidFill>
-                <a:effectLst/>
-                <a:latin typeface="Nitro"/>
-                <a:ea typeface="Calibri" panose="020F0502020204030204" pitchFamily="34" charset="0"/>
-              </a:rPr>
-              <a:t>Вид зашифрованных сообщений</a:t>
-            </a:r>
-            <a:endParaRPr lang="ru-RU" b="1" dirty="0">
-              <a:solidFill>
-                <a:srgbClr val="0F8B8D"/>
-              </a:solidFill>
-              <a:latin typeface="Nitro"/>
-            </a:endParaRPr>
-          </a:p>
-        </p:txBody>
-      </p:sp>
     </p:spTree>
     <p:extLst>
       <p:ext uri="{BB962C8B-B14F-4D97-AF65-F5344CB8AC3E}">
-        <p14:creationId xmlns:p14="http://schemas.microsoft.com/office/powerpoint/2010/main" val="969218937"/>
+        <p14:creationId xmlns:p14="http://schemas.microsoft.com/office/powerpoint/2010/main" val="2924927354"/>
       </p:ext>
     </p:extLst>
   </p:cSld>
@@ -4098,6 +4112,114 @@
       </p:grpSpPr>
       <p:pic>
         <p:nvPicPr>
+          <p:cNvPr id="5" name="Объект 4">
+            <a:extLst>
+              <a:ext uri="{FF2B5EF4-FFF2-40B4-BE49-F238E27FC236}">
+                <a16:creationId xmlns:a16="http://schemas.microsoft.com/office/drawing/2014/main" id="{5D8B4F46-79B9-470D-9C1A-D0DE89D529EB}"/>
+              </a:ext>
+            </a:extLst>
+          </p:cNvPr>
+          <p:cNvPicPr>
+            <a:picLocks noGrp="1" noChangeAspect="1"/>
+          </p:cNvPicPr>
+          <p:nvPr>
+            <p:ph idx="1"/>
+          </p:nvPr>
+        </p:nvPicPr>
+        <p:blipFill>
+          <a:blip r:embed="rId2">
+            <a:extLst>
+              <a:ext uri="{28A0092B-C50C-407E-A947-70E740481C1C}">
+                <a14:useLocalDpi xmlns:a14="http://schemas.microsoft.com/office/drawing/2010/main" val="0"/>
+              </a:ext>
+            </a:extLst>
+          </a:blip>
+          <a:stretch>
+            <a:fillRect/>
+          </a:stretch>
+        </p:blipFill>
+        <p:spPr>
+          <a:xfrm>
+            <a:off x="1651201" y="1706560"/>
+            <a:ext cx="8889597" cy="3444880"/>
+          </a:xfrm>
+        </p:spPr>
+      </p:pic>
+      <p:sp>
+        <p:nvSpPr>
+          <p:cNvPr id="4" name="Заголовок 3">
+            <a:extLst>
+              <a:ext uri="{FF2B5EF4-FFF2-40B4-BE49-F238E27FC236}">
+                <a16:creationId xmlns:a16="http://schemas.microsoft.com/office/drawing/2014/main" id="{56239CED-F83E-4522-A408-B541449884DD}"/>
+              </a:ext>
+            </a:extLst>
+          </p:cNvPr>
+          <p:cNvSpPr>
+            <a:spLocks noGrp="1"/>
+          </p:cNvSpPr>
+          <p:nvPr>
+            <p:ph type="title"/>
+          </p:nvPr>
+        </p:nvSpPr>
+        <p:spPr/>
+        <p:txBody>
+          <a:bodyPr>
+            <a:normAutofit/>
+          </a:bodyPr>
+          <a:lstStyle/>
+          <a:p>
+            <a:r>
+              <a:rPr lang="ru-RU" b="1" dirty="0">
+                <a:solidFill>
+                  <a:srgbClr val="0F8B8D"/>
+                </a:solidFill>
+                <a:effectLst/>
+                <a:latin typeface="Nitro"/>
+                <a:ea typeface="Calibri" panose="020F0502020204030204" pitchFamily="34" charset="0"/>
+              </a:rPr>
+              <a:t>Вид зашифрованных сообщений</a:t>
+            </a:r>
+            <a:endParaRPr lang="ru-RU" b="1" dirty="0">
+              <a:solidFill>
+                <a:srgbClr val="0F8B8D"/>
+              </a:solidFill>
+              <a:latin typeface="Nitro"/>
+            </a:endParaRPr>
+          </a:p>
+        </p:txBody>
+      </p:sp>
+    </p:spTree>
+    <p:extLst>
+      <p:ext uri="{BB962C8B-B14F-4D97-AF65-F5344CB8AC3E}">
+        <p14:creationId xmlns:p14="http://schemas.microsoft.com/office/powerpoint/2010/main" val="969218937"/>
+      </p:ext>
+    </p:extLst>
+  </p:cSld>
+  <p:clrMapOvr>
+    <a:masterClrMapping/>
+  </p:clrMapOvr>
+</p:sld>
+</file>
+
+<file path=ppt/slides/slide13.xml><?xml version="1.0" encoding="utf-8"?>
+<p:sld xmlns:a="http://schemas.openxmlformats.org/drawingml/2006/main" xmlns:r="http://schemas.openxmlformats.org/officeDocument/2006/relationships" xmlns:p="http://schemas.openxmlformats.org/presentationml/2006/main">
+  <p:cSld>
+    <p:spTree>
+      <p:nvGrpSpPr>
+        <p:cNvPr id="1" name=""/>
+        <p:cNvGrpSpPr/>
+        <p:nvPr/>
+      </p:nvGrpSpPr>
+      <p:grpSpPr>
+        <a:xfrm>
+          <a:off x="0" y="0"/>
+          <a:ext cx="0" cy="0"/>
+          <a:chOff x="0" y="0"/>
+          <a:chExt cx="0" cy="0"/>
+        </a:xfrm>
+      </p:grpSpPr>
+      <p:pic>
+        <p:nvPicPr>
           <p:cNvPr id="5" name="Рисунок 4">
             <a:extLst>
               <a:ext uri="{FF2B5EF4-FFF2-40B4-BE49-F238E27FC236}">
@@ -4212,7 +4334,7 @@
 </p:sld>
 </file>
 
-<file path=ppt/slides/slide13.xml><?xml version="1.0" encoding="utf-8"?>
+<file path=ppt/slides/slide14.xml><?xml version="1.0" encoding="utf-8"?>
 <p:sld xmlns:a="http://schemas.openxmlformats.org/drawingml/2006/main" xmlns:r="http://schemas.openxmlformats.org/officeDocument/2006/relationships" xmlns:p="http://schemas.openxmlformats.org/presentationml/2006/main">
   <p:cSld>
     <p:spTree>
@@ -4725,7 +4847,7 @@
 </p:sld>
 </file>
 
-<file path=ppt/slides/slide14.xml><?xml version="1.0" encoding="utf-8"?>
+<file path=ppt/slides/slide15.xml><?xml version="1.0" encoding="utf-8"?>
 <p:sld xmlns:a="http://schemas.openxmlformats.org/drawingml/2006/main" xmlns:r="http://schemas.openxmlformats.org/officeDocument/2006/relationships" xmlns:p="http://schemas.openxmlformats.org/presentationml/2006/main">
   <p:cSld>
     <p:spTree>
@@ -5257,7 +5379,7 @@
 </p:sld>
 </file>
 
-<file path=ppt/slides/slide15.xml><?xml version="1.0" encoding="utf-8"?>
+<file path=ppt/slides/slide16.xml><?xml version="1.0" encoding="utf-8"?>
 <p:sld xmlns:a="http://schemas.openxmlformats.org/drawingml/2006/main" xmlns:r="http://schemas.openxmlformats.org/officeDocument/2006/relationships" xmlns:p="http://schemas.openxmlformats.org/presentationml/2006/main">
   <p:cSld>
     <p:spTree>
@@ -5769,7 +5891,7 @@
 </p:sld>
 </file>
 
-<file path=ppt/slides/slide16.xml><?xml version="1.0" encoding="utf-8"?>
+<file path=ppt/slides/slide17.xml><?xml version="1.0" encoding="utf-8"?>
 <p:sld xmlns:a="http://schemas.openxmlformats.org/drawingml/2006/main" xmlns:r="http://schemas.openxmlformats.org/officeDocument/2006/relationships" xmlns:p="http://schemas.openxmlformats.org/presentationml/2006/main">
   <p:cSld>
     <p:spTree>
@@ -5857,15 +5979,6 @@
             <a:r>
               <a:rPr lang="ru-RU" dirty="0">
                 <a:solidFill>
-                  <a:srgbClr val="143642"/>
-                </a:solidFill>
-                <a:latin typeface="Bahnschrift SemiBold SemiConden" panose="020B0502040204020203" pitchFamily="34" charset="0"/>
-              </a:rPr>
-              <a:t>	</a:t>
-            </a:r>
-            <a:r>
-              <a:rPr lang="ru-RU" dirty="0">
-                <a:solidFill>
                   <a:srgbClr val="0F8B8D"/>
                 </a:solidFill>
                 <a:latin typeface="Bahnschrift SemiBold SemiConden" panose="020B0502040204020203" pitchFamily="34" charset="0"/>
@@ -5905,14 +6018,6 @@
             <a:r>
               <a:rPr lang="ru-RU" dirty="0">
                 <a:solidFill>
-                  <a:srgbClr val="143642"/>
-                </a:solidFill>
-              </a:rPr>
-              <a:t>	</a:t>
-            </a:r>
-            <a:r>
-              <a:rPr lang="ru-RU" dirty="0">
-                <a:solidFill>
                   <a:srgbClr val="0F8B8D"/>
                 </a:solidFill>
                 <a:latin typeface="Bahnschrift SemiBold SemiConden" panose="020B0502040204020203" pitchFamily="34" charset="0"/>
@@ -5938,9 +6043,6 @@
             </a:br>
             <a:r>
               <a:rPr lang="ru-RU" dirty="0">
-                <a:solidFill>
-                  <a:srgbClr val="0F8B8D"/>
-                </a:solidFill>
                 <a:latin typeface="Bahnschrift SemiBold SemiConden" panose="020B0502040204020203" pitchFamily="34" charset="0"/>
               </a:rPr>
               <a:t>О</a:t>
@@ -5985,7 +6087,7 @@
 </p:sld>
 </file>
 
-<file path=ppt/slides/slide17.xml><?xml version="1.0" encoding="utf-8"?>
+<file path=ppt/slides/slide18.xml><?xml version="1.0" encoding="utf-8"?>
 <p:sld xmlns:a="http://schemas.openxmlformats.org/drawingml/2006/main" xmlns:r="http://schemas.openxmlformats.org/officeDocument/2006/relationships" xmlns:p="http://schemas.openxmlformats.org/presentationml/2006/main">
   <p:cSld>
     <p:spTree>
@@ -6192,35 +6294,68 @@
                 </a:solidFill>
                 <a:latin typeface="Bahnschrift SemiBold SemiConden" panose="020B0502040204020203" pitchFamily="34" charset="0"/>
               </a:rPr>
-              <a:t>П</a:t>
-            </a:r>
-            <a:r>
-              <a:rPr lang="ru-RU" dirty="0">
-                <a:solidFill>
-                  <a:srgbClr val="143642"/>
-                </a:solidFill>
-                <a:latin typeface="Bahnschrift SemiBold SemiConden" panose="020B0502040204020203" pitchFamily="34" charset="0"/>
-              </a:rPr>
-              <a:t>роблема</a:t>
-            </a:r>
-            <a:r>
-              <a:rPr lang="ru-RU" dirty="0">
+              <a:t>А</a:t>
+            </a:r>
+            <a:r>
+              <a:rPr lang="ru-RU" dirty="0">
+                <a:solidFill>
+                  <a:srgbClr val="143642"/>
+                </a:solidFill>
+                <a:latin typeface="Bahnschrift SemiBold SemiConden" panose="020B0502040204020203" pitchFamily="34" charset="0"/>
+              </a:rPr>
+              <a:t>ктуальность</a:t>
+            </a:r>
+            <a:r>
+              <a:rPr lang="en-US" dirty="0">
                 <a:solidFill>
                   <a:srgbClr val="0F8B8D"/>
                 </a:solidFill>
                 <a:latin typeface="Bahnschrift SemiBold SemiConden" panose="020B0502040204020203" pitchFamily="34" charset="0"/>
               </a:rPr>
-              <a:t>: </a:t>
-            </a:r>
-            <a:r>
-              <a:rPr lang="ru-RU" dirty="0">
-                <a:solidFill>
-                  <a:srgbClr val="143642"/>
-                </a:solidFill>
-                <a:latin typeface="Bahnschrift SemiBold SemiConden" panose="020B0502040204020203" pitchFamily="34" charset="0"/>
-              </a:rPr>
-              <a:t>разработчики мессенджеров могут расшифровать сообщения.</a:t>
-            </a:r>
+              <a:t>:</a:t>
+            </a:r>
+            <a:r>
+              <a:rPr lang="en-US" dirty="0">
+                <a:solidFill>
+                  <a:srgbClr val="143642"/>
+                </a:solidFill>
+                <a:latin typeface="Bahnschrift SemiBold SemiConden" panose="020B0502040204020203" pitchFamily="34" charset="0"/>
+              </a:rPr>
+              <a:t> </a:t>
+            </a:r>
+            <a:r>
+              <a:rPr lang="ru-RU" dirty="0">
+                <a:solidFill>
+                  <a:srgbClr val="143642"/>
+                </a:solidFill>
+                <a:latin typeface="Bahnschrift SemiBold SemiConden" panose="020B0502040204020203" pitchFamily="34" charset="0"/>
+              </a:rPr>
+              <a:t>Все больше людей переходят с общения в живую на общения в мессенджерах</a:t>
+            </a:r>
+            <a:r>
+              <a:rPr lang="en-US" dirty="0">
+                <a:solidFill>
+                  <a:srgbClr val="143642"/>
+                </a:solidFill>
+                <a:latin typeface="Bahnschrift SemiBold SemiConden" panose="020B0502040204020203" pitchFamily="34" charset="0"/>
+              </a:rPr>
+              <a:t>.</a:t>
+            </a:r>
+            <a:r>
+              <a:rPr lang="ru-RU" dirty="0">
+                <a:solidFill>
+                  <a:srgbClr val="143642"/>
+                </a:solidFill>
+                <a:latin typeface="Bahnschrift SemiBold SemiConden" panose="020B0502040204020203" pitchFamily="34" charset="0"/>
+              </a:rPr>
+              <a:t> </a:t>
+            </a:r>
+            <a:endParaRPr lang="ru-RU" dirty="0">
+              <a:solidFill>
+                <a:srgbClr val="0F8B8D"/>
+              </a:solidFill>
+              <a:latin typeface="Bahnschrift SemiBold SemiConden" panose="020B0502040204020203" pitchFamily="34" charset="0"/>
+            </a:endParaRPr>
           </a:p>
           <a:p>
             <a:pPr marL="0" indent="0">
@@ -6242,61 +6377,34 @@
                 </a:solidFill>
                 <a:latin typeface="Bahnschrift SemiBold SemiConden" panose="020B0502040204020203" pitchFamily="34" charset="0"/>
               </a:rPr>
-              <a:t>А</a:t>
-            </a:r>
-            <a:r>
-              <a:rPr lang="ru-RU" dirty="0">
-                <a:solidFill>
-                  <a:srgbClr val="143642"/>
-                </a:solidFill>
-                <a:latin typeface="Bahnschrift SemiBold SemiConden" panose="020B0502040204020203" pitchFamily="34" charset="0"/>
-              </a:rPr>
-              <a:t>ктуальность</a:t>
-            </a:r>
-            <a:r>
-              <a:rPr lang="en-US" dirty="0">
+              <a:t>П</a:t>
+            </a:r>
+            <a:r>
+              <a:rPr lang="ru-RU" dirty="0">
+                <a:solidFill>
+                  <a:srgbClr val="143642"/>
+                </a:solidFill>
+                <a:latin typeface="Bahnschrift SemiBold SemiConden" panose="020B0502040204020203" pitchFamily="34" charset="0"/>
+              </a:rPr>
+              <a:t>роблема</a:t>
+            </a:r>
+            <a:r>
+              <a:rPr lang="ru-RU" dirty="0">
                 <a:solidFill>
                   <a:srgbClr val="0F8B8D"/>
                 </a:solidFill>
                 <a:latin typeface="Bahnschrift SemiBold SemiConden" panose="020B0502040204020203" pitchFamily="34" charset="0"/>
               </a:rPr>
-              <a:t>:</a:t>
-            </a:r>
-            <a:r>
-              <a:rPr lang="en-US" dirty="0">
-                <a:solidFill>
-                  <a:srgbClr val="143642"/>
-                </a:solidFill>
-                <a:latin typeface="Bahnschrift SemiBold SemiConden" panose="020B0502040204020203" pitchFamily="34" charset="0"/>
-              </a:rPr>
-              <a:t> </a:t>
-            </a:r>
-            <a:r>
-              <a:rPr lang="ru-RU" dirty="0">
-                <a:solidFill>
-                  <a:srgbClr val="143642"/>
-                </a:solidFill>
-                <a:latin typeface="Bahnschrift SemiBold SemiConden" panose="020B0502040204020203" pitchFamily="34" charset="0"/>
-              </a:rPr>
-              <a:t>Все больше людей переходят с общения в живую на общения в мессенджерах</a:t>
-            </a:r>
-            <a:r>
-              <a:rPr lang="en-US" dirty="0">
-                <a:solidFill>
-                  <a:srgbClr val="143642"/>
-                </a:solidFill>
-                <a:latin typeface="Bahnschrift SemiBold SemiConden" panose="020B0502040204020203" pitchFamily="34" charset="0"/>
-              </a:rPr>
-              <a:t>.</a:t>
-            </a:r>
-            <a:r>
-              <a:rPr lang="ru-RU" dirty="0">
-                <a:solidFill>
-                  <a:srgbClr val="143642"/>
-                </a:solidFill>
-                <a:latin typeface="Bahnschrift SemiBold SemiConden" panose="020B0502040204020203" pitchFamily="34" charset="0"/>
-              </a:rPr>
-              <a:t> </a:t>
+              <a:t>: </a:t>
+            </a:r>
+            <a:r>
+              <a:rPr lang="ru-RU" dirty="0">
+                <a:solidFill>
+                  <a:srgbClr val="143642"/>
+                </a:solidFill>
+                <a:latin typeface="Bahnschrift SemiBold SemiConden" panose="020B0502040204020203" pitchFamily="34" charset="0"/>
+              </a:rPr>
+              <a:t>Разработчики мессенджеров могут расшифровать сообщения.</a:t>
             </a:r>
           </a:p>
         </p:txBody>
@@ -6441,102 +6549,6 @@
               <a:buNone/>
             </a:pPr>
             <a:r>
-              <a:rPr lang="ru-RU" b="1" dirty="0">
-                <a:solidFill>
-                  <a:srgbClr val="0F8B8D"/>
-                </a:solidFill>
-                <a:latin typeface="Bahnschrift SemiBold SemiConden" panose="020B0502040204020203" pitchFamily="34" charset="0"/>
-              </a:rPr>
-              <a:t>Н</a:t>
-            </a:r>
-            <a:r>
-              <a:rPr lang="ru-RU" b="1" dirty="0">
-                <a:solidFill>
-                  <a:srgbClr val="143642"/>
-                </a:solidFill>
-                <a:latin typeface="Bahnschrift SemiBold SemiConden" panose="020B0502040204020203" pitchFamily="34" charset="0"/>
-              </a:rPr>
-              <a:t>овизна</a:t>
-            </a:r>
-            <a:r>
-              <a:rPr lang="en-US" b="1" dirty="0">
-                <a:solidFill>
-                  <a:srgbClr val="0F8B8D"/>
-                </a:solidFill>
-                <a:latin typeface="Bahnschrift SemiBold SemiConden" panose="020B0502040204020203" pitchFamily="34" charset="0"/>
-              </a:rPr>
-              <a:t>:</a:t>
-            </a:r>
-            <a:r>
-              <a:rPr lang="en-US" b="1" dirty="0">
-                <a:solidFill>
-                  <a:srgbClr val="143642"/>
-                </a:solidFill>
-                <a:latin typeface="Bahnschrift SemiBold SemiConden" panose="020B0502040204020203" pitchFamily="34" charset="0"/>
-              </a:rPr>
-              <a:t> </a:t>
-            </a:r>
-            <a:r>
-              <a:rPr lang="ru-RU" b="1" dirty="0">
-                <a:solidFill>
-                  <a:srgbClr val="143642"/>
-                </a:solidFill>
-                <a:latin typeface="Bahnschrift SemiBold SemiConden" panose="020B0502040204020203" pitchFamily="34" charset="0"/>
-                <a:cs typeface="Times New Roman" panose="02020603050405020304" pitchFamily="18" charset="0"/>
-              </a:rPr>
-              <a:t>Реализация архитектуры Zero-Knowledge </a:t>
-            </a:r>
-            <a:r>
-              <a:rPr lang="ru-RU" b="1" dirty="0" err="1">
-                <a:solidFill>
-                  <a:srgbClr val="143642"/>
-                </a:solidFill>
-                <a:latin typeface="Bahnschrift SemiBold SemiConden" panose="020B0502040204020203" pitchFamily="34" charset="0"/>
-                <a:cs typeface="Times New Roman" panose="02020603050405020304" pitchFamily="18" charset="0"/>
-              </a:rPr>
-              <a:t>Encryption</a:t>
-            </a:r>
-            <a:r>
-              <a:rPr lang="ru-RU" b="1" dirty="0">
-                <a:solidFill>
-                  <a:srgbClr val="143642"/>
-                </a:solidFill>
-                <a:latin typeface="Bahnschrift SemiBold SemiConden" panose="020B0502040204020203" pitchFamily="34" charset="0"/>
-                <a:cs typeface="Times New Roman" panose="02020603050405020304" pitchFamily="18" charset="0"/>
-              </a:rPr>
-              <a:t> на связке клиентского ECDH + AES-GC</a:t>
-            </a:r>
-            <a:r>
-              <a:rPr lang="en-US" b="1" dirty="0">
-                <a:solidFill>
-                  <a:srgbClr val="143642"/>
-                </a:solidFill>
-                <a:latin typeface="Bahnschrift SemiBold SemiConden" panose="020B0502040204020203" pitchFamily="34" charset="0"/>
-                <a:cs typeface="Times New Roman" panose="02020603050405020304" pitchFamily="18" charset="0"/>
-              </a:rPr>
-              <a:t>M</a:t>
-            </a:r>
-            <a:endParaRPr lang="en-US" dirty="0">
-              <a:solidFill>
-                <a:srgbClr val="0F8B8D"/>
-              </a:solidFill>
-              <a:latin typeface="Bahnschrift SemiBold SemiConden" panose="020B0502040204020203" pitchFamily="34" charset="0"/>
-            </a:endParaRPr>
-          </a:p>
-          <a:p>
-            <a:pPr marL="0" indent="0">
-              <a:lnSpc>
-                <a:spcPct val="150000"/>
-              </a:lnSpc>
-              <a:spcBef>
-                <a:spcPts val="0"/>
-              </a:spcBef>
-              <a:spcAft>
-                <a:spcPts val="2400"/>
-              </a:spcAft>
-              <a:buNone/>
-            </a:pPr>
-            <a:r>
               <a:rPr lang="ru-RU" dirty="0">
                 <a:solidFill>
                   <a:srgbClr val="0F8B8D"/>
@@ -6910,7 +6922,7 @@
                 </a:solidFill>
                 <a:latin typeface="Bahnschrift SemiBold SemiConden" panose="020B0502040204020203" pitchFamily="34" charset="0"/>
               </a:rPr>
-              <a:t>беспечить безопасность данных</a:t>
+              <a:t>беспечить безопасное хранение данных</a:t>
             </a:r>
           </a:p>
         </p:txBody>
@@ -7299,6 +7311,33 @@
               <a:t>, </a:t>
             </a:r>
             <a:r>
+              <a:rPr lang="en-US" dirty="0" err="1">
+                <a:solidFill>
+                  <a:srgbClr val="143642"/>
+                </a:solidFill>
+                <a:latin typeface="Bahnschrift SemiBold SemiConden" panose="020B0502040204020203" pitchFamily="34" charset="0"/>
+              </a:rPr>
+              <a:t>js</a:t>
+            </a:r>
+            <a:r>
+              <a:rPr lang="en-US" dirty="0">
+                <a:solidFill>
+                  <a:srgbClr val="143642"/>
+                </a:solidFill>
+                <a:latin typeface="Bahnschrift SemiBold SemiConden" panose="020B0502040204020203" pitchFamily="34" charset="0"/>
+              </a:rPr>
+              <a:t>,</a:t>
+            </a:r>
+            <a:r>
+              <a:rPr lang="ru-RU" dirty="0">
+                <a:solidFill>
+                  <a:srgbClr val="143642"/>
+                </a:solidFill>
+                <a:latin typeface="Bahnschrift SemiBold SemiConden" panose="020B0502040204020203" pitchFamily="34" charset="0"/>
+              </a:rPr>
+              <a:t> </a:t>
+            </a:r>
+            <a:r>
               <a:rPr lang="ru-RU" dirty="0" err="1">
                 <a:solidFill>
                   <a:srgbClr val="143642"/>
@@ -7593,7 +7632,7 @@
         </p:nvSpPr>
         <p:spPr>
           <a:xfrm>
-            <a:off x="554070" y="3259965"/>
+            <a:off x="554070" y="3349134"/>
             <a:ext cx="568260" cy="573849"/>
           </a:xfrm>
           <a:prstGeom prst="roundRect">
@@ -7738,7 +7777,7 @@
           <p:cNvPr id="2" name="Заголовок 1">
             <a:extLst>
               <a:ext uri="{FF2B5EF4-FFF2-40B4-BE49-F238E27FC236}">
-                <a16:creationId xmlns:a16="http://schemas.microsoft.com/office/drawing/2014/main" id="{5DFB8684-625A-405F-9332-04904C56D917}"/>
+                <a16:creationId xmlns:a16="http://schemas.microsoft.com/office/drawing/2014/main" id="{0A422E75-4615-4BB2-BB0C-AD21F8050CB5}"/>
               </a:ext>
             </a:extLst>
           </p:cNvPr>
@@ -7761,35 +7800,17 @@
                 </a:solidFill>
                 <a:latin typeface="Nitro"/>
               </a:rPr>
-              <a:t>Как работает </a:t>
-            </a:r>
-            <a:r>
-              <a:rPr lang="en-US" b="1" dirty="0">
-                <a:solidFill>
-                  <a:srgbClr val="0F8B8D"/>
-                </a:solidFill>
-                <a:latin typeface="Nitro"/>
-              </a:rPr>
-              <a:t>ECDH</a:t>
-            </a:r>
-            <a:r>
-              <a:rPr lang="ru-RU" b="1" dirty="0">
-                <a:solidFill>
-                  <a:srgbClr val="0F8B8D"/>
-                </a:solidFill>
-                <a:latin typeface="Nitro"/>
-              </a:rPr>
-              <a:t>?</a:t>
+              <a:t>Общая архитектура приложения</a:t>
             </a:r>
           </a:p>
         </p:txBody>
       </p:sp>
       <p:pic>
         <p:nvPicPr>
-          <p:cNvPr id="9" name="Объект 8">
-            <a:extLst>
-              <a:ext uri="{FF2B5EF4-FFF2-40B4-BE49-F238E27FC236}">
-                <a16:creationId xmlns:a16="http://schemas.microsoft.com/office/drawing/2014/main" id="{516F5488-7C69-49FE-859D-C780CA17D799}"/>
+          <p:cNvPr id="6" name="Объект 5">
+            <a:extLst>
+              <a:ext uri="{FF2B5EF4-FFF2-40B4-BE49-F238E27FC236}">
+                <a16:creationId xmlns:a16="http://schemas.microsoft.com/office/drawing/2014/main" id="{09511344-A5B0-4FF3-9978-6C87B8787282}"/>
               </a:ext>
             </a:extLst>
           </p:cNvPr>
@@ -7814,15 +7835,15 @@
         </p:blipFill>
         <p:spPr>
           <a:xfrm>
-            <a:off x="1754109" y="1515585"/>
-            <a:ext cx="8683782" cy="4977290"/>
+            <a:off x="1722155" y="1690688"/>
+            <a:ext cx="8747690" cy="4538896"/>
           </a:xfrm>
         </p:spPr>
       </p:pic>
     </p:spTree>
     <p:extLst>
       <p:ext uri="{BB962C8B-B14F-4D97-AF65-F5344CB8AC3E}">
-        <p14:creationId xmlns:p14="http://schemas.microsoft.com/office/powerpoint/2010/main" val="3378537684"/>
+        <p14:creationId xmlns:p14="http://schemas.microsoft.com/office/powerpoint/2010/main" val="3957046980"/>
       </p:ext>
     </p:extLst>
   </p:cSld>
@@ -7912,8 +7933,8 @@
         </p:blipFill>
         <p:spPr>
           <a:xfrm>
-            <a:off x="1361616" y="1515291"/>
-            <a:ext cx="8892329" cy="4652963"/>
+            <a:off x="1268829" y="1441185"/>
+            <a:ext cx="9654342" cy="5051690"/>
           </a:xfrm>
         </p:spPr>
       </p:pic>
@@ -7952,7 +7973,7 @@
           <p:cNvPr id="2" name="Заголовок 1">
             <a:extLst>
               <a:ext uri="{FF2B5EF4-FFF2-40B4-BE49-F238E27FC236}">
-                <a16:creationId xmlns:a16="http://schemas.microsoft.com/office/drawing/2014/main" id="{0A422E75-4615-4BB2-BB0C-AD21F8050CB5}"/>
+                <a16:creationId xmlns:a16="http://schemas.microsoft.com/office/drawing/2014/main" id="{5DFB8684-625A-405F-9332-04904C56D917}"/>
               </a:ext>
             </a:extLst>
           </p:cNvPr>
@@ -7975,17 +7996,50 @@
                 </a:solidFill>
                 <a:latin typeface="Nitro"/>
               </a:rPr>
-              <a:t>Общая архитектура приложения</a:t>
-            </a:r>
+              <a:t>Работа </a:t>
+            </a:r>
+            <a:r>
+              <a:rPr lang="en-US" b="1" dirty="0">
+                <a:solidFill>
+                  <a:srgbClr val="0F8B8D"/>
+                </a:solidFill>
+                <a:latin typeface="Nitro"/>
+              </a:rPr>
+              <a:t>ECDH</a:t>
+            </a:r>
+            <a:r>
+              <a:rPr lang="ru-RU" b="1" dirty="0">
+                <a:solidFill>
+                  <a:srgbClr val="0F8B8D"/>
+                </a:solidFill>
+                <a:latin typeface="Nitro"/>
+              </a:rPr>
+              <a:t> (</a:t>
+            </a:r>
+            <a:r>
+              <a:rPr lang="en-US" b="1" dirty="0">
+                <a:solidFill>
+                  <a:srgbClr val="0F8B8D"/>
+                </a:solidFill>
+                <a:latin typeface="Nitro"/>
+              </a:rPr>
+              <a:t>Elliptic Curve Diffie-Hellman)</a:t>
+            </a:r>
+            <a:endParaRPr lang="ru-RU" b="1" dirty="0">
+              <a:solidFill>
+                <a:srgbClr val="0F8B8D"/>
+              </a:solidFill>
+              <a:latin typeface="Nitro"/>
+            </a:endParaRPr>
           </a:p>
         </p:txBody>
       </p:sp>
       <p:pic>
         <p:nvPicPr>
-          <p:cNvPr id="13" name="Объект 12">
-            <a:extLst>
-              <a:ext uri="{FF2B5EF4-FFF2-40B4-BE49-F238E27FC236}">
-                <a16:creationId xmlns:a16="http://schemas.microsoft.com/office/drawing/2014/main" id="{679174D7-C992-4C17-840E-570692E6B038}"/>
+          <p:cNvPr id="9" name="Объект 8">
+            <a:extLst>
+              <a:ext uri="{FF2B5EF4-FFF2-40B4-BE49-F238E27FC236}">
+                <a16:creationId xmlns:a16="http://schemas.microsoft.com/office/drawing/2014/main" id="{516F5488-7C69-49FE-859D-C780CA17D799}"/>
               </a:ext>
             </a:extLst>
           </p:cNvPr>
@@ -8010,15 +8064,15 @@
         </p:blipFill>
         <p:spPr>
           <a:xfrm>
-            <a:off x="1549910" y="1559486"/>
-            <a:ext cx="9092179" cy="4721980"/>
+            <a:off x="1754109" y="1515585"/>
+            <a:ext cx="8683782" cy="4977290"/>
           </a:xfrm>
         </p:spPr>
       </p:pic>
     </p:spTree>
     <p:extLst>
       <p:ext uri="{BB962C8B-B14F-4D97-AF65-F5344CB8AC3E}">
-        <p14:creationId xmlns:p14="http://schemas.microsoft.com/office/powerpoint/2010/main" val="3957046980"/>
+        <p14:creationId xmlns:p14="http://schemas.microsoft.com/office/powerpoint/2010/main" val="3378537684"/>
       </p:ext>
     </p:extLst>
   </p:cSld>
@@ -8045,101 +8099,117 @@
           <a:chExt cx="0" cy="0"/>
         </a:xfrm>
       </p:grpSpPr>
+      <p:sp>
+        <p:nvSpPr>
+          <p:cNvPr id="2" name="Заголовок 1">
+            <a:extLst>
+              <a:ext uri="{FF2B5EF4-FFF2-40B4-BE49-F238E27FC236}">
+                <a16:creationId xmlns:a16="http://schemas.microsoft.com/office/drawing/2014/main" id="{7C8AEA18-8D37-4E2F-BA51-6D6A61EA32DB}"/>
+              </a:ext>
+            </a:extLst>
+          </p:cNvPr>
+          <p:cNvSpPr>
+            <a:spLocks noGrp="1"/>
+          </p:cNvSpPr>
+          <p:nvPr>
+            <p:ph type="title"/>
+          </p:nvPr>
+        </p:nvSpPr>
+        <p:spPr>
+          <a:xfrm>
+            <a:off x="809897" y="365125"/>
+            <a:ext cx="10789920" cy="1325563"/>
+          </a:xfrm>
+        </p:spPr>
+        <p:txBody>
+          <a:bodyPr/>
+          <a:lstStyle/>
+          <a:p>
+            <a:r>
+              <a:rPr lang="ru-RU" b="1" dirty="0">
+                <a:solidFill>
+                  <a:srgbClr val="0F8B8D"/>
+                </a:solidFill>
+                <a:latin typeface="Nirtro"/>
+              </a:rPr>
+              <a:t>Работа </a:t>
+            </a:r>
+            <a:r>
+              <a:rPr lang="en-US" b="1" dirty="0">
+                <a:solidFill>
+                  <a:srgbClr val="0F8B8D"/>
+                </a:solidFill>
+                <a:latin typeface="Nirtro"/>
+              </a:rPr>
+              <a:t>AES-GCM-256</a:t>
+            </a:r>
+            <a:r>
+              <a:rPr lang="ru-RU" b="1" dirty="0">
+                <a:solidFill>
+                  <a:srgbClr val="0F8B8D"/>
+                </a:solidFill>
+                <a:latin typeface="Nirtro"/>
+              </a:rPr>
+              <a:t> (</a:t>
+            </a:r>
+            <a:r>
+              <a:rPr lang="en-US" b="1" i="0" dirty="0">
+                <a:solidFill>
+                  <a:srgbClr val="0F8B8D"/>
+                </a:solidFill>
+                <a:effectLst/>
+                <a:latin typeface="Nitro"/>
+              </a:rPr>
+              <a:t>Galois/Counter Mode)</a:t>
+            </a:r>
+            <a:endParaRPr lang="ru-RU" b="1" dirty="0">
+              <a:solidFill>
+                <a:srgbClr val="0F8B8D"/>
+              </a:solidFill>
+              <a:latin typeface="Nitro"/>
+            </a:endParaRPr>
+          </a:p>
+        </p:txBody>
+      </p:sp>
       <p:pic>
         <p:nvPicPr>
-          <p:cNvPr id="5" name="Рисунок 4">
-            <a:extLst>
-              <a:ext uri="{FF2B5EF4-FFF2-40B4-BE49-F238E27FC236}">
-                <a16:creationId xmlns:a16="http://schemas.microsoft.com/office/drawing/2014/main" id="{44F882AB-839B-4304-8441-5D9013D18DFA}"/>
+          <p:cNvPr id="5" name="Объект 4">
+            <a:extLst>
+              <a:ext uri="{FF2B5EF4-FFF2-40B4-BE49-F238E27FC236}">
+                <a16:creationId xmlns:a16="http://schemas.microsoft.com/office/drawing/2014/main" id="{C137012F-F043-47A6-BF91-8014DB7A90F8}"/>
               </a:ext>
             </a:extLst>
           </p:cNvPr>
           <p:cNvPicPr>
-            <a:picLocks noChangeAspect="1"/>
+            <a:picLocks noGrp="1" noChangeAspect="1"/>
           </p:cNvPicPr>
-          <p:nvPr/>
+          <p:nvPr>
+            <p:ph idx="1"/>
+          </p:nvPr>
         </p:nvPicPr>
         <p:blipFill>
-          <a:blip r:embed="rId2"/>
+          <a:blip r:embed="rId2">
+            <a:extLst>
+              <a:ext uri="{28A0092B-C50C-407E-A947-70E740481C1C}">
+                <a14:useLocalDpi xmlns:a14="http://schemas.microsoft.com/office/drawing/2010/main" val="0"/>
+              </a:ext>
+            </a:extLst>
+          </a:blip>
           <a:stretch>
             <a:fillRect/>
           </a:stretch>
         </p:blipFill>
         <p:spPr>
           <a:xfrm>
-            <a:off x="0" y="496522"/>
-            <a:ext cx="12192000" cy="5864956"/>
+            <a:off x="1630658" y="1690688"/>
+            <a:ext cx="9969159" cy="4522181"/>
           </a:xfrm>
-          <a:prstGeom prst="rect">
-            <a:avLst/>
-          </a:prstGeom>
         </p:spPr>
       </p:pic>
-      <p:sp>
-        <p:nvSpPr>
-          <p:cNvPr id="2" name="Заголовок 1">
-            <a:extLst>
-              <a:ext uri="{FF2B5EF4-FFF2-40B4-BE49-F238E27FC236}">
-                <a16:creationId xmlns:a16="http://schemas.microsoft.com/office/drawing/2014/main" id="{23826193-A27C-4EA5-9FA5-12CBCC55A661}"/>
-              </a:ext>
-            </a:extLst>
-          </p:cNvPr>
-          <p:cNvSpPr>
-            <a:spLocks noGrp="1"/>
-          </p:cNvSpPr>
-          <p:nvPr>
-            <p:ph type="title"/>
-          </p:nvPr>
-        </p:nvSpPr>
-        <p:spPr/>
-        <p:txBody>
-          <a:bodyPr/>
-          <a:lstStyle/>
-          <a:p>
-            <a:r>
-              <a:rPr lang="ru-RU" b="1" dirty="0">
-                <a:solidFill>
-                  <a:srgbClr val="0F8B8D"/>
-                </a:solidFill>
-                <a:latin typeface="Nitro"/>
-              </a:rPr>
-              <a:t>Вид пользовательского интерфейса</a:t>
-            </a:r>
-          </a:p>
-        </p:txBody>
-      </p:sp>
-      <p:sp>
-        <p:nvSpPr>
-          <p:cNvPr id="3" name="Объект 2">
-            <a:extLst>
-              <a:ext uri="{FF2B5EF4-FFF2-40B4-BE49-F238E27FC236}">
-                <a16:creationId xmlns:a16="http://schemas.microsoft.com/office/drawing/2014/main" id="{A132BF6F-16A8-49B4-973F-79636197B093}"/>
-              </a:ext>
-            </a:extLst>
-          </p:cNvPr>
-          <p:cNvSpPr>
-            <a:spLocks noGrp="1"/>
-          </p:cNvSpPr>
-          <p:nvPr>
-            <p:ph idx="1"/>
-          </p:nvPr>
-        </p:nvSpPr>
-        <p:spPr/>
-        <p:txBody>
-          <a:bodyPr/>
-          <a:lstStyle/>
-          <a:p>
-            <a:pPr marL="0" indent="0">
-              <a:buNone/>
-            </a:pPr>
-            <a:endParaRPr lang="ru-RU" dirty="0"/>
-          </a:p>
-        </p:txBody>
-      </p:sp>
     </p:spTree>
     <p:extLst>
       <p:ext uri="{BB962C8B-B14F-4D97-AF65-F5344CB8AC3E}">
-        <p14:creationId xmlns:p14="http://schemas.microsoft.com/office/powerpoint/2010/main" val="3325232728"/>
+        <p14:creationId xmlns:p14="http://schemas.microsoft.com/office/powerpoint/2010/main" val="2891150114"/>
       </p:ext>
     </p:extLst>
   </p:cSld>
